--- a/(승건)Figure.pptx
+++ b/(승건)Figure.pptx
@@ -3765,10 +3765,10 @@
       </p:grpSpPr>
       <p:sp>
         <p:nvSpPr>
-          <p:cNvPr id="3" name="사각형: 잘린 한쪽 모서리 2">
-            <a:extLst>
-              <a:ext uri="{FF2B5EF4-FFF2-40B4-BE49-F238E27FC236}">
-                <a16:creationId xmlns:a16="http://schemas.microsoft.com/office/drawing/2014/main" id="{3C26DD5C-5856-4C16-9A07-4CE32BABA9E5}"/>
+          <p:cNvPr id="28" name="순서도: 자기 디스크 27">
+            <a:extLst>
+              <a:ext uri="{FF2B5EF4-FFF2-40B4-BE49-F238E27FC236}">
+                <a16:creationId xmlns:a16="http://schemas.microsoft.com/office/drawing/2014/main" id="{8A85A14A-5E61-4836-83CE-5E622C7CE2C9}"/>
               </a:ext>
             </a:extLst>
           </p:cNvPr>
@@ -3777,15 +3777,20 @@
         </p:nvSpPr>
         <p:spPr>
           <a:xfrm>
-            <a:off x="4324350" y="1092200"/>
-            <a:ext cx="3543300" cy="3962400"/>
-          </a:xfrm>
-          <a:prstGeom prst="snip1Rect">
+            <a:off x="376428" y="2629408"/>
+            <a:ext cx="1592072" cy="621792"/>
+          </a:xfrm>
+          <a:prstGeom prst="flowChartMagneticDisk">
             <a:avLst/>
           </a:prstGeom>
           <a:solidFill>
-            <a:srgbClr val="FFFF00"/>
+            <a:schemeClr val="bg1"/>
           </a:solidFill>
+          <a:ln>
+            <a:solidFill>
+              <a:srgbClr val="D92FF5"/>
+            </a:solidFill>
+          </a:ln>
         </p:spPr>
         <p:style>
           <a:lnRef idx="2">
@@ -3809,47 +3814,1252 @@
           <a:p>
             <a:pPr algn="ctr"/>
             <a:r>
-              <a:rPr lang="ko-KR" altLang="en-US" dirty="0">
-                <a:solidFill>
-                  <a:sysClr val="windowText" lastClr="000000"/>
-                </a:solidFill>
-              </a:rPr>
-              <a:t>데이터셋 구축 과정</a:t>
-            </a:r>
-            <a:r>
-              <a:rPr lang="en-US" altLang="ko-KR" dirty="0">
-                <a:solidFill>
-                  <a:sysClr val="windowText" lastClr="000000"/>
-                </a:solidFill>
-              </a:rPr>
-              <a:t>(</a:t>
-            </a:r>
-            <a:r>
-              <a:rPr lang="ko-KR" altLang="en-US" dirty="0">
-                <a:solidFill>
-                  <a:sysClr val="windowText" lastClr="000000"/>
-                </a:solidFill>
-              </a:rPr>
-              <a:t>엑셀파일</a:t>
-            </a:r>
-            <a:r>
-              <a:rPr lang="en-US" altLang="ko-KR" dirty="0">
-                <a:solidFill>
-                  <a:sysClr val="windowText" lastClr="000000"/>
-                </a:solidFill>
-              </a:rPr>
-              <a:t>) </a:t>
-            </a:r>
-          </a:p>
+              <a:rPr lang="ko-KR" altLang="en-US" sz="1200" dirty="0" err="1">
+                <a:solidFill>
+                  <a:schemeClr val="tx1"/>
+                </a:solidFill>
+                <a:latin typeface="나눔고딕" panose="020D0604000000000000" pitchFamily="50" charset="-127"/>
+                <a:ea typeface="나눔고딕" panose="020D0604000000000000" pitchFamily="50" charset="-127"/>
+              </a:rPr>
+              <a:t>공정위</a:t>
+            </a:r>
+            <a:r>
+              <a:rPr lang="ko-KR" altLang="en-US" sz="1200" dirty="0">
+                <a:solidFill>
+                  <a:schemeClr val="tx1"/>
+                </a:solidFill>
+                <a:latin typeface="나눔고딕" panose="020D0604000000000000" pitchFamily="50" charset="-127"/>
+                <a:ea typeface="나눔고딕" panose="020D0604000000000000" pitchFamily="50" charset="-127"/>
+              </a:rPr>
+              <a:t> 보도자료</a:t>
+            </a:r>
+          </a:p>
+        </p:txBody>
+      </p:sp>
+      <p:sp>
+        <p:nvSpPr>
+          <p:cNvPr id="34" name="순서도: 자기 디스크 33">
+            <a:extLst>
+              <a:ext uri="{FF2B5EF4-FFF2-40B4-BE49-F238E27FC236}">
+                <a16:creationId xmlns:a16="http://schemas.microsoft.com/office/drawing/2014/main" id="{63437061-7F72-4675-9304-A3C13C351DAF}"/>
+              </a:ext>
+            </a:extLst>
+          </p:cNvPr>
+          <p:cNvSpPr/>
+          <p:nvPr/>
+        </p:nvSpPr>
+        <p:spPr>
+          <a:xfrm>
+            <a:off x="376428" y="4242308"/>
+            <a:ext cx="1592072" cy="621792"/>
+          </a:xfrm>
+          <a:prstGeom prst="flowChartMagneticDisk">
+            <a:avLst/>
+          </a:prstGeom>
+          <a:solidFill>
+            <a:schemeClr val="bg1"/>
+          </a:solidFill>
+          <a:ln>
+            <a:solidFill>
+              <a:srgbClr val="D92FF5"/>
+            </a:solidFill>
+          </a:ln>
+        </p:spPr>
+        <p:style>
+          <a:lnRef idx="2">
+            <a:schemeClr val="accent1">
+              <a:shade val="50000"/>
+            </a:schemeClr>
+          </a:lnRef>
+          <a:fillRef idx="1">
+            <a:schemeClr val="accent1"/>
+          </a:fillRef>
+          <a:effectRef idx="0">
+            <a:schemeClr val="accent1"/>
+          </a:effectRef>
+          <a:fontRef idx="minor">
+            <a:schemeClr val="lt1"/>
+          </a:fontRef>
+        </p:style>
+        <p:txBody>
+          <a:bodyPr rtlCol="0" anchor="ctr"/>
+          <a:lstStyle/>
           <a:p>
             <a:pPr algn="ctr"/>
             <a:r>
-              <a:rPr lang="ko-KR" altLang="en-US" dirty="0">
-                <a:solidFill>
-                  <a:sysClr val="windowText" lastClr="000000"/>
-                </a:solidFill>
-              </a:rPr>
-              <a:t>도식화 필요</a:t>
+              <a:rPr lang="ko-KR" altLang="en-US" sz="1200" dirty="0" err="1">
+                <a:solidFill>
+                  <a:schemeClr val="tx1"/>
+                </a:solidFill>
+                <a:latin typeface="나눔고딕" panose="020D0604000000000000" pitchFamily="50" charset="-127"/>
+                <a:ea typeface="나눔고딕" panose="020D0604000000000000" pitchFamily="50" charset="-127"/>
+              </a:rPr>
+              <a:t>공정위</a:t>
+            </a:r>
+            <a:r>
+              <a:rPr lang="ko-KR" altLang="en-US" sz="1200" dirty="0">
+                <a:solidFill>
+                  <a:schemeClr val="tx1"/>
+                </a:solidFill>
+                <a:latin typeface="나눔고딕" panose="020D0604000000000000" pitchFamily="50" charset="-127"/>
+                <a:ea typeface="나눔고딕" panose="020D0604000000000000" pitchFamily="50" charset="-127"/>
+              </a:rPr>
+              <a:t> 해명자료</a:t>
+            </a:r>
+          </a:p>
+        </p:txBody>
+      </p:sp>
+      <p:sp>
+        <p:nvSpPr>
+          <p:cNvPr id="35" name="순서도: 자기 디스크 34">
+            <a:extLst>
+              <a:ext uri="{FF2B5EF4-FFF2-40B4-BE49-F238E27FC236}">
+                <a16:creationId xmlns:a16="http://schemas.microsoft.com/office/drawing/2014/main" id="{813E21B4-85A4-49B5-B7DD-8D28FCF7E75F}"/>
+              </a:ext>
+            </a:extLst>
+          </p:cNvPr>
+          <p:cNvSpPr/>
+          <p:nvPr/>
+        </p:nvSpPr>
+        <p:spPr>
+          <a:xfrm>
+            <a:off x="376428" y="3435858"/>
+            <a:ext cx="1592072" cy="621792"/>
+          </a:xfrm>
+          <a:prstGeom prst="flowChartMagneticDisk">
+            <a:avLst/>
+          </a:prstGeom>
+          <a:solidFill>
+            <a:schemeClr val="bg1"/>
+          </a:solidFill>
+          <a:ln>
+            <a:solidFill>
+              <a:srgbClr val="D92FF5"/>
+            </a:solidFill>
+          </a:ln>
+        </p:spPr>
+        <p:style>
+          <a:lnRef idx="2">
+            <a:schemeClr val="accent1">
+              <a:shade val="50000"/>
+            </a:schemeClr>
+          </a:lnRef>
+          <a:fillRef idx="1">
+            <a:schemeClr val="accent1"/>
+          </a:fillRef>
+          <a:effectRef idx="0">
+            <a:schemeClr val="accent1"/>
+          </a:effectRef>
+          <a:fontRef idx="minor">
+            <a:schemeClr val="lt1"/>
+          </a:fontRef>
+        </p:style>
+        <p:txBody>
+          <a:bodyPr rtlCol="0" anchor="ctr"/>
+          <a:lstStyle/>
+          <a:p>
+            <a:pPr algn="ctr"/>
+            <a:r>
+              <a:rPr lang="ko-KR" altLang="en-US" sz="1200" err="1">
+                <a:solidFill>
+                  <a:schemeClr val="tx1"/>
+                </a:solidFill>
+                <a:latin typeface="나눔고딕" panose="020D0604000000000000" pitchFamily="50" charset="-127"/>
+                <a:ea typeface="나눔고딕" panose="020D0604000000000000" pitchFamily="50" charset="-127"/>
+              </a:rPr>
+              <a:t>공정위</a:t>
+            </a:r>
+            <a:r>
+              <a:rPr lang="ko-KR" altLang="en-US" sz="1200" dirty="0">
+                <a:solidFill>
+                  <a:schemeClr val="tx1"/>
+                </a:solidFill>
+                <a:latin typeface="나눔고딕" panose="020D0604000000000000" pitchFamily="50" charset="-127"/>
+                <a:ea typeface="나눔고딕" panose="020D0604000000000000" pitchFamily="50" charset="-127"/>
+              </a:rPr>
+              <a:t> 설명자료</a:t>
+            </a:r>
+          </a:p>
+        </p:txBody>
+      </p:sp>
+      <p:sp>
+        <p:nvSpPr>
+          <p:cNvPr id="39" name="순서도: 자기 디스크 38">
+            <a:extLst>
+              <a:ext uri="{FF2B5EF4-FFF2-40B4-BE49-F238E27FC236}">
+                <a16:creationId xmlns:a16="http://schemas.microsoft.com/office/drawing/2014/main" id="{9C2B9781-F778-4EE5-A5E9-8A38B4E276B5}"/>
+              </a:ext>
+            </a:extLst>
+          </p:cNvPr>
+          <p:cNvSpPr/>
+          <p:nvPr/>
+        </p:nvSpPr>
+        <p:spPr>
+          <a:xfrm>
+            <a:off x="376428" y="1822958"/>
+            <a:ext cx="1592072" cy="621792"/>
+          </a:xfrm>
+          <a:prstGeom prst="flowChartMagneticDisk">
+            <a:avLst/>
+          </a:prstGeom>
+          <a:solidFill>
+            <a:schemeClr val="bg1"/>
+          </a:solidFill>
+          <a:ln>
+            <a:solidFill>
+              <a:srgbClr val="D92FF5"/>
+            </a:solidFill>
+          </a:ln>
+        </p:spPr>
+        <p:style>
+          <a:lnRef idx="2">
+            <a:schemeClr val="accent1">
+              <a:shade val="50000"/>
+            </a:schemeClr>
+          </a:lnRef>
+          <a:fillRef idx="1">
+            <a:schemeClr val="accent1"/>
+          </a:fillRef>
+          <a:effectRef idx="0">
+            <a:schemeClr val="accent1"/>
+          </a:effectRef>
+          <a:fontRef idx="minor">
+            <a:schemeClr val="lt1"/>
+          </a:fontRef>
+        </p:style>
+        <p:txBody>
+          <a:bodyPr rtlCol="0" anchor="ctr"/>
+          <a:lstStyle/>
+          <a:p>
+            <a:pPr algn="ctr"/>
+            <a:r>
+              <a:rPr lang="ko-KR" altLang="en-US" sz="1200">
+                <a:solidFill>
+                  <a:schemeClr val="tx1"/>
+                </a:solidFill>
+                <a:latin typeface="나눔고딕" panose="020D0604000000000000" pitchFamily="50" charset="-127"/>
+                <a:ea typeface="나눔고딕" panose="020D0604000000000000" pitchFamily="50" charset="-127"/>
+              </a:rPr>
+              <a:t>의결서</a:t>
+            </a:r>
+            <a:endParaRPr lang="ko-KR" altLang="en-US" sz="1200" dirty="0">
+              <a:solidFill>
+                <a:schemeClr val="tx1"/>
+              </a:solidFill>
+              <a:latin typeface="나눔고딕" panose="020D0604000000000000" pitchFamily="50" charset="-127"/>
+              <a:ea typeface="나눔고딕" panose="020D0604000000000000" pitchFamily="50" charset="-127"/>
+            </a:endParaRPr>
+          </a:p>
+        </p:txBody>
+      </p:sp>
+      <p:pic>
+        <p:nvPicPr>
+          <p:cNvPr id="9" name="그림 8">
+            <a:extLst>
+              <a:ext uri="{FF2B5EF4-FFF2-40B4-BE49-F238E27FC236}">
+                <a16:creationId xmlns:a16="http://schemas.microsoft.com/office/drawing/2014/main" id="{5F7EF272-CCD1-457E-852A-0F743C426FD1}"/>
+              </a:ext>
+            </a:extLst>
+          </p:cNvPr>
+          <p:cNvPicPr>
+            <a:picLocks noChangeAspect="1"/>
+          </p:cNvPicPr>
+          <p:nvPr/>
+        </p:nvPicPr>
+        <p:blipFill>
+          <a:blip r:embed="rId3">
+            <a:extLst>
+              <a:ext uri="{28A0092B-C50C-407E-A947-70E740481C1C}">
+                <a14:useLocalDpi xmlns:a14="http://schemas.microsoft.com/office/drawing/2010/main" val="0"/>
+              </a:ext>
+            </a:extLst>
+          </a:blip>
+          <a:stretch>
+            <a:fillRect/>
+          </a:stretch>
+        </p:blipFill>
+        <p:spPr>
+          <a:xfrm>
+            <a:off x="3610101" y="2629408"/>
+            <a:ext cx="526797" cy="526797"/>
+          </a:xfrm>
+          <a:prstGeom prst="rect">
+            <a:avLst/>
+          </a:prstGeom>
+        </p:spPr>
+      </p:pic>
+      <p:sp>
+        <p:nvSpPr>
+          <p:cNvPr id="10" name="화살표: 오른쪽 9">
+            <a:extLst>
+              <a:ext uri="{FF2B5EF4-FFF2-40B4-BE49-F238E27FC236}">
+                <a16:creationId xmlns:a16="http://schemas.microsoft.com/office/drawing/2014/main" id="{AC54DD91-3D24-44A9-A5D7-17263E527675}"/>
+              </a:ext>
+            </a:extLst>
+          </p:cNvPr>
+          <p:cNvSpPr/>
+          <p:nvPr/>
+        </p:nvSpPr>
+        <p:spPr>
+          <a:xfrm>
+            <a:off x="2616200" y="2711703"/>
+            <a:ext cx="876300" cy="1448308"/>
+          </a:xfrm>
+          <a:prstGeom prst="rightArrow">
+            <a:avLst/>
+          </a:prstGeom>
+        </p:spPr>
+        <p:style>
+          <a:lnRef idx="2">
+            <a:schemeClr val="accent1">
+              <a:shade val="50000"/>
+            </a:schemeClr>
+          </a:lnRef>
+          <a:fillRef idx="1">
+            <a:schemeClr val="accent1"/>
+          </a:fillRef>
+          <a:effectRef idx="0">
+            <a:schemeClr val="accent1"/>
+          </a:effectRef>
+          <a:fontRef idx="minor">
+            <a:schemeClr val="lt1"/>
+          </a:fontRef>
+        </p:style>
+        <p:txBody>
+          <a:bodyPr rtlCol="0" anchor="ctr"/>
+          <a:lstStyle/>
+          <a:p>
+            <a:pPr algn="ctr"/>
+            <a:endParaRPr lang="ko-KR" altLang="en-US"/>
+          </a:p>
+        </p:txBody>
+      </p:sp>
+      <p:sp>
+        <p:nvSpPr>
+          <p:cNvPr id="45" name="직사각형 44">
+            <a:extLst>
+              <a:ext uri="{FF2B5EF4-FFF2-40B4-BE49-F238E27FC236}">
+                <a16:creationId xmlns:a16="http://schemas.microsoft.com/office/drawing/2014/main" id="{42C0B16F-8C79-4014-910C-30FB157E27E9}"/>
+              </a:ext>
+            </a:extLst>
+          </p:cNvPr>
+          <p:cNvSpPr/>
+          <p:nvPr/>
+        </p:nvSpPr>
+        <p:spPr>
+          <a:xfrm>
+            <a:off x="98298" y="1395984"/>
+            <a:ext cx="2136902" cy="3836416"/>
+          </a:xfrm>
+          <a:prstGeom prst="rect">
+            <a:avLst/>
+          </a:prstGeom>
+          <a:noFill/>
+          <a:ln>
+            <a:solidFill>
+              <a:schemeClr val="tx1"/>
+            </a:solidFill>
+            <a:prstDash val="dash"/>
+          </a:ln>
+        </p:spPr>
+        <p:style>
+          <a:lnRef idx="2">
+            <a:schemeClr val="accent1">
+              <a:shade val="50000"/>
+            </a:schemeClr>
+          </a:lnRef>
+          <a:fillRef idx="1">
+            <a:schemeClr val="accent1"/>
+          </a:fillRef>
+          <a:effectRef idx="0">
+            <a:schemeClr val="accent1"/>
+          </a:effectRef>
+          <a:fontRef idx="minor">
+            <a:schemeClr val="lt1"/>
+          </a:fontRef>
+        </p:style>
+        <p:txBody>
+          <a:bodyPr rtlCol="0" anchor="ctr"/>
+          <a:lstStyle/>
+          <a:p>
+            <a:pPr algn="ctr"/>
+            <a:endParaRPr lang="ko-KR" altLang="en-US"/>
+          </a:p>
+        </p:txBody>
+      </p:sp>
+      <p:sp>
+        <p:nvSpPr>
+          <p:cNvPr id="46" name="사각형: 둥근 모서리 45">
+            <a:extLst>
+              <a:ext uri="{FF2B5EF4-FFF2-40B4-BE49-F238E27FC236}">
+                <a16:creationId xmlns:a16="http://schemas.microsoft.com/office/drawing/2014/main" id="{E66AD765-CE18-4E0B-ABE6-3A5CB46142B4}"/>
+              </a:ext>
+            </a:extLst>
+          </p:cNvPr>
+          <p:cNvSpPr/>
+          <p:nvPr/>
+        </p:nvSpPr>
+        <p:spPr>
+          <a:xfrm>
+            <a:off x="3755898" y="3124961"/>
+            <a:ext cx="1616204" cy="621792"/>
+          </a:xfrm>
+          <a:prstGeom prst="roundRect">
+            <a:avLst/>
+          </a:prstGeom>
+          <a:solidFill>
+            <a:schemeClr val="bg1"/>
+          </a:solidFill>
+          <a:ln>
+            <a:solidFill>
+              <a:srgbClr val="D92FF5"/>
+            </a:solidFill>
+          </a:ln>
+        </p:spPr>
+        <p:style>
+          <a:lnRef idx="2">
+            <a:schemeClr val="accent1">
+              <a:shade val="50000"/>
+            </a:schemeClr>
+          </a:lnRef>
+          <a:fillRef idx="1">
+            <a:schemeClr val="accent1"/>
+          </a:fillRef>
+          <a:effectRef idx="0">
+            <a:schemeClr val="accent1"/>
+          </a:effectRef>
+          <a:fontRef idx="minor">
+            <a:schemeClr val="lt1"/>
+          </a:fontRef>
+        </p:style>
+        <p:txBody>
+          <a:bodyPr rtlCol="0" anchor="ctr"/>
+          <a:lstStyle/>
+          <a:p>
+            <a:pPr algn="ctr"/>
+            <a:r>
+              <a:rPr lang="ko-KR" altLang="en-US" sz="1200" dirty="0">
+                <a:solidFill>
+                  <a:schemeClr val="tx1"/>
+                </a:solidFill>
+                <a:latin typeface="나눔고딕" panose="020D0604000000000000" pitchFamily="50" charset="-127"/>
+                <a:ea typeface="나눔고딕" panose="020D0604000000000000" pitchFamily="50" charset="-127"/>
+              </a:rPr>
+              <a:t>기업 컴플라이언스 </a:t>
+            </a:r>
+            <a:endParaRPr lang="en-US" altLang="ko-KR" sz="1200" dirty="0">
+              <a:solidFill>
+                <a:schemeClr val="tx1"/>
+              </a:solidFill>
+              <a:latin typeface="나눔고딕" panose="020D0604000000000000" pitchFamily="50" charset="-127"/>
+              <a:ea typeface="나눔고딕" panose="020D0604000000000000" pitchFamily="50" charset="-127"/>
+            </a:endParaRPr>
+          </a:p>
+          <a:p>
+            <a:pPr algn="ctr"/>
+            <a:r>
+              <a:rPr lang="ko-KR" altLang="en-US" sz="1200" dirty="0">
+                <a:solidFill>
+                  <a:schemeClr val="tx1"/>
+                </a:solidFill>
+                <a:latin typeface="나눔고딕" panose="020D0604000000000000" pitchFamily="50" charset="-127"/>
+                <a:ea typeface="나눔고딕" panose="020D0604000000000000" pitchFamily="50" charset="-127"/>
+              </a:rPr>
+              <a:t>페르소나 생성</a:t>
+            </a:r>
+          </a:p>
+        </p:txBody>
+      </p:sp>
+      <p:sp>
+        <p:nvSpPr>
+          <p:cNvPr id="47" name="순서도: 문서 46">
+            <a:extLst>
+              <a:ext uri="{FF2B5EF4-FFF2-40B4-BE49-F238E27FC236}">
+                <a16:creationId xmlns:a16="http://schemas.microsoft.com/office/drawing/2014/main" id="{C5BB4C5F-4165-4166-B314-86796A3FDE03}"/>
+              </a:ext>
+            </a:extLst>
+          </p:cNvPr>
+          <p:cNvSpPr/>
+          <p:nvPr/>
+        </p:nvSpPr>
+        <p:spPr>
+          <a:xfrm>
+            <a:off x="6856730" y="3072892"/>
+            <a:ext cx="1616204" cy="521208"/>
+          </a:xfrm>
+          <a:prstGeom prst="flowChartDocument">
+            <a:avLst/>
+          </a:prstGeom>
+          <a:solidFill>
+            <a:schemeClr val="bg1"/>
+          </a:solidFill>
+          <a:ln>
+            <a:solidFill>
+              <a:srgbClr val="D92FF5"/>
+            </a:solidFill>
+          </a:ln>
+        </p:spPr>
+        <p:style>
+          <a:lnRef idx="2">
+            <a:schemeClr val="accent1">
+              <a:shade val="50000"/>
+            </a:schemeClr>
+          </a:lnRef>
+          <a:fillRef idx="1">
+            <a:schemeClr val="accent1"/>
+          </a:fillRef>
+          <a:effectRef idx="0">
+            <a:schemeClr val="accent1"/>
+          </a:effectRef>
+          <a:fontRef idx="minor">
+            <a:schemeClr val="lt1"/>
+          </a:fontRef>
+        </p:style>
+        <p:txBody>
+          <a:bodyPr rtlCol="0" anchor="ctr"/>
+          <a:lstStyle/>
+          <a:p>
+            <a:pPr algn="ctr"/>
+            <a:r>
+              <a:rPr lang="en-US" altLang="ko-KR" sz="1200" dirty="0">
+                <a:solidFill>
+                  <a:schemeClr val="tx1"/>
+                </a:solidFill>
+                <a:latin typeface="Arial Rounded MT Bold" panose="020F0704030504030204" pitchFamily="34" charset="0"/>
+              </a:rPr>
+              <a:t>Resolution</a:t>
+            </a:r>
+          </a:p>
+          <a:p>
+            <a:pPr algn="ctr"/>
+            <a:r>
+              <a:rPr lang="en-US" altLang="ko-KR" sz="1200" dirty="0">
+                <a:solidFill>
+                  <a:schemeClr val="tx1"/>
+                </a:solidFill>
+                <a:latin typeface="Arial Rounded MT Bold" panose="020F0704030504030204" pitchFamily="34" charset="0"/>
+              </a:rPr>
+              <a:t>Document</a:t>
+            </a:r>
+            <a:endParaRPr lang="ko-KR" altLang="en-US" sz="1200" dirty="0">
+              <a:solidFill>
+                <a:schemeClr val="tx1"/>
+              </a:solidFill>
+              <a:latin typeface="Arial Rounded MT Bold" panose="020F0704030504030204" pitchFamily="34" charset="0"/>
+            </a:endParaRPr>
+          </a:p>
+        </p:txBody>
+      </p:sp>
+      <p:sp>
+        <p:nvSpPr>
+          <p:cNvPr id="48" name="순서도: 문서 47">
+            <a:extLst>
+              <a:ext uri="{FF2B5EF4-FFF2-40B4-BE49-F238E27FC236}">
+                <a16:creationId xmlns:a16="http://schemas.microsoft.com/office/drawing/2014/main" id="{843821B7-695B-4662-BE75-67B202FFB6F5}"/>
+              </a:ext>
+            </a:extLst>
+          </p:cNvPr>
+          <p:cNvSpPr/>
+          <p:nvPr/>
+        </p:nvSpPr>
+        <p:spPr>
+          <a:xfrm>
+            <a:off x="6784340" y="3127756"/>
+            <a:ext cx="1616204" cy="521208"/>
+          </a:xfrm>
+          <a:prstGeom prst="flowChartDocument">
+            <a:avLst/>
+          </a:prstGeom>
+          <a:solidFill>
+            <a:schemeClr val="bg1"/>
+          </a:solidFill>
+          <a:ln>
+            <a:solidFill>
+              <a:srgbClr val="D92FF5"/>
+            </a:solidFill>
+          </a:ln>
+        </p:spPr>
+        <p:style>
+          <a:lnRef idx="2">
+            <a:schemeClr val="accent1">
+              <a:shade val="50000"/>
+            </a:schemeClr>
+          </a:lnRef>
+          <a:fillRef idx="1">
+            <a:schemeClr val="accent1"/>
+          </a:fillRef>
+          <a:effectRef idx="0">
+            <a:schemeClr val="accent1"/>
+          </a:effectRef>
+          <a:fontRef idx="minor">
+            <a:schemeClr val="lt1"/>
+          </a:fontRef>
+        </p:style>
+        <p:txBody>
+          <a:bodyPr rtlCol="0" anchor="ctr"/>
+          <a:lstStyle/>
+          <a:p>
+            <a:pPr algn="ctr"/>
+            <a:r>
+              <a:rPr lang="en-US" altLang="ko-KR" sz="1200" dirty="0">
+                <a:solidFill>
+                  <a:schemeClr val="tx1"/>
+                </a:solidFill>
+                <a:latin typeface="Arial Rounded MT Bold" panose="020F0704030504030204" pitchFamily="34" charset="0"/>
+              </a:rPr>
+              <a:t>Resolution</a:t>
+            </a:r>
+          </a:p>
+          <a:p>
+            <a:pPr algn="ctr"/>
+            <a:r>
+              <a:rPr lang="en-US" altLang="ko-KR" sz="1200" dirty="0">
+                <a:solidFill>
+                  <a:schemeClr val="tx1"/>
+                </a:solidFill>
+                <a:latin typeface="Arial Rounded MT Bold" panose="020F0704030504030204" pitchFamily="34" charset="0"/>
+              </a:rPr>
+              <a:t>Document</a:t>
+            </a:r>
+            <a:endParaRPr lang="ko-KR" altLang="en-US" sz="1200" dirty="0">
+              <a:solidFill>
+                <a:schemeClr val="tx1"/>
+              </a:solidFill>
+              <a:latin typeface="Arial Rounded MT Bold" panose="020F0704030504030204" pitchFamily="34" charset="0"/>
+            </a:endParaRPr>
+          </a:p>
+        </p:txBody>
+      </p:sp>
+      <p:sp>
+        <p:nvSpPr>
+          <p:cNvPr id="49" name="순서도: 문서 48">
+            <a:extLst>
+              <a:ext uri="{FF2B5EF4-FFF2-40B4-BE49-F238E27FC236}">
+                <a16:creationId xmlns:a16="http://schemas.microsoft.com/office/drawing/2014/main" id="{3A6933EE-AA4C-4BE5-8F23-EBD330154B71}"/>
+              </a:ext>
+            </a:extLst>
+          </p:cNvPr>
+          <p:cNvSpPr/>
+          <p:nvPr/>
+        </p:nvSpPr>
+        <p:spPr>
+          <a:xfrm>
+            <a:off x="6711950" y="3189478"/>
+            <a:ext cx="1616204" cy="521208"/>
+          </a:xfrm>
+          <a:prstGeom prst="flowChartDocument">
+            <a:avLst/>
+          </a:prstGeom>
+          <a:solidFill>
+            <a:schemeClr val="bg1"/>
+          </a:solidFill>
+          <a:ln>
+            <a:solidFill>
+              <a:srgbClr val="D92FF5"/>
+            </a:solidFill>
+          </a:ln>
+        </p:spPr>
+        <p:style>
+          <a:lnRef idx="2">
+            <a:schemeClr val="accent1">
+              <a:shade val="50000"/>
+            </a:schemeClr>
+          </a:lnRef>
+          <a:fillRef idx="1">
+            <a:schemeClr val="accent1"/>
+          </a:fillRef>
+          <a:effectRef idx="0">
+            <a:schemeClr val="accent1"/>
+          </a:effectRef>
+          <a:fontRef idx="minor">
+            <a:schemeClr val="lt1"/>
+          </a:fontRef>
+        </p:style>
+        <p:txBody>
+          <a:bodyPr rtlCol="0" anchor="ctr"/>
+          <a:lstStyle/>
+          <a:p>
+            <a:pPr algn="ctr"/>
+            <a:r>
+              <a:rPr lang="ko-KR" altLang="en-US" sz="1200" dirty="0">
+                <a:solidFill>
+                  <a:schemeClr val="tx1"/>
+                </a:solidFill>
+                <a:latin typeface="나눔고딕" panose="020D0604000000000000" pitchFamily="50" charset="-127"/>
+                <a:ea typeface="나눔고딕" panose="020D0604000000000000" pitchFamily="50" charset="-127"/>
+              </a:rPr>
+              <a:t>기업 컴플라이언스 </a:t>
+            </a:r>
+            <a:endParaRPr lang="en-US" altLang="ko-KR" sz="1200" dirty="0">
+              <a:solidFill>
+                <a:schemeClr val="tx1"/>
+              </a:solidFill>
+              <a:latin typeface="나눔고딕" panose="020D0604000000000000" pitchFamily="50" charset="-127"/>
+              <a:ea typeface="나눔고딕" panose="020D0604000000000000" pitchFamily="50" charset="-127"/>
+            </a:endParaRPr>
+          </a:p>
+          <a:p>
+            <a:pPr algn="ctr"/>
+            <a:r>
+              <a:rPr lang="ko-KR" altLang="en-US" sz="1200" dirty="0">
+                <a:solidFill>
+                  <a:schemeClr val="tx1"/>
+                </a:solidFill>
+                <a:latin typeface="나눔고딕" panose="020D0604000000000000" pitchFamily="50" charset="-127"/>
+                <a:ea typeface="나눔고딕" panose="020D0604000000000000" pitchFamily="50" charset="-127"/>
+              </a:rPr>
+              <a:t>페르소나</a:t>
+            </a:r>
+          </a:p>
+        </p:txBody>
+      </p:sp>
+      <p:sp>
+        <p:nvSpPr>
+          <p:cNvPr id="50" name="화살표: 오른쪽 49">
+            <a:extLst>
+              <a:ext uri="{FF2B5EF4-FFF2-40B4-BE49-F238E27FC236}">
+                <a16:creationId xmlns:a16="http://schemas.microsoft.com/office/drawing/2014/main" id="{E0FE85A2-E2BE-4018-8D30-A0B3E99D72F4}"/>
+              </a:ext>
+            </a:extLst>
+          </p:cNvPr>
+          <p:cNvSpPr/>
+          <p:nvPr/>
+        </p:nvSpPr>
+        <p:spPr>
+          <a:xfrm>
+            <a:off x="5626100" y="2711703"/>
+            <a:ext cx="876300" cy="1448308"/>
+          </a:xfrm>
+          <a:prstGeom prst="rightArrow">
+            <a:avLst/>
+          </a:prstGeom>
+        </p:spPr>
+        <p:style>
+          <a:lnRef idx="2">
+            <a:schemeClr val="accent1">
+              <a:shade val="50000"/>
+            </a:schemeClr>
+          </a:lnRef>
+          <a:fillRef idx="1">
+            <a:schemeClr val="accent1"/>
+          </a:fillRef>
+          <a:effectRef idx="0">
+            <a:schemeClr val="accent1"/>
+          </a:effectRef>
+          <a:fontRef idx="minor">
+            <a:schemeClr val="lt1"/>
+          </a:fontRef>
+        </p:style>
+        <p:txBody>
+          <a:bodyPr rtlCol="0" anchor="ctr"/>
+          <a:lstStyle/>
+          <a:p>
+            <a:pPr algn="ctr"/>
+            <a:endParaRPr lang="ko-KR" altLang="en-US"/>
+          </a:p>
+        </p:txBody>
+      </p:sp>
+      <p:pic>
+        <p:nvPicPr>
+          <p:cNvPr id="51" name="그림 50">
+            <a:extLst>
+              <a:ext uri="{FF2B5EF4-FFF2-40B4-BE49-F238E27FC236}">
+                <a16:creationId xmlns:a16="http://schemas.microsoft.com/office/drawing/2014/main" id="{FBD35009-A8F0-4678-826E-513AF76F1936}"/>
+              </a:ext>
+            </a:extLst>
+          </p:cNvPr>
+          <p:cNvPicPr>
+            <a:picLocks noChangeAspect="1"/>
+          </p:cNvPicPr>
+          <p:nvPr/>
+        </p:nvPicPr>
+        <p:blipFill>
+          <a:blip r:embed="rId3">
+            <a:extLst>
+              <a:ext uri="{28A0092B-C50C-407E-A947-70E740481C1C}">
+                <a14:useLocalDpi xmlns:a14="http://schemas.microsoft.com/office/drawing/2010/main" val="0"/>
+              </a:ext>
+            </a:extLst>
+          </a:blip>
+          <a:stretch>
+            <a:fillRect/>
+          </a:stretch>
+        </p:blipFill>
+        <p:spPr>
+          <a:xfrm>
+            <a:off x="9741663" y="2629408"/>
+            <a:ext cx="526797" cy="526797"/>
+          </a:xfrm>
+          <a:prstGeom prst="rect">
+            <a:avLst/>
+          </a:prstGeom>
+        </p:spPr>
+      </p:pic>
+      <p:sp>
+        <p:nvSpPr>
+          <p:cNvPr id="52" name="화살표: 오른쪽 51">
+            <a:extLst>
+              <a:ext uri="{FF2B5EF4-FFF2-40B4-BE49-F238E27FC236}">
+                <a16:creationId xmlns:a16="http://schemas.microsoft.com/office/drawing/2014/main" id="{6A8F1894-81D7-4133-BF0A-884EB14550BF}"/>
+              </a:ext>
+            </a:extLst>
+          </p:cNvPr>
+          <p:cNvSpPr/>
+          <p:nvPr/>
+        </p:nvSpPr>
+        <p:spPr>
+          <a:xfrm>
+            <a:off x="8747762" y="2711703"/>
+            <a:ext cx="876300" cy="1448308"/>
+          </a:xfrm>
+          <a:prstGeom prst="rightArrow">
+            <a:avLst/>
+          </a:prstGeom>
+        </p:spPr>
+        <p:style>
+          <a:lnRef idx="2">
+            <a:schemeClr val="accent1">
+              <a:shade val="50000"/>
+            </a:schemeClr>
+          </a:lnRef>
+          <a:fillRef idx="1">
+            <a:schemeClr val="accent1"/>
+          </a:fillRef>
+          <a:effectRef idx="0">
+            <a:schemeClr val="accent1"/>
+          </a:effectRef>
+          <a:fontRef idx="minor">
+            <a:schemeClr val="lt1"/>
+          </a:fontRef>
+        </p:style>
+        <p:txBody>
+          <a:bodyPr rtlCol="0" anchor="ctr"/>
+          <a:lstStyle/>
+          <a:p>
+            <a:pPr algn="ctr"/>
+            <a:endParaRPr lang="ko-KR" altLang="en-US"/>
+          </a:p>
+        </p:txBody>
+      </p:sp>
+      <p:sp>
+        <p:nvSpPr>
+          <p:cNvPr id="53" name="사각형: 둥근 모서리 52">
+            <a:extLst>
+              <a:ext uri="{FF2B5EF4-FFF2-40B4-BE49-F238E27FC236}">
+                <a16:creationId xmlns:a16="http://schemas.microsoft.com/office/drawing/2014/main" id="{24E32370-6BFF-4AB6-AF3B-55253BF02280}"/>
+              </a:ext>
+            </a:extLst>
+          </p:cNvPr>
+          <p:cNvSpPr/>
+          <p:nvPr/>
+        </p:nvSpPr>
+        <p:spPr>
+          <a:xfrm>
+            <a:off x="9887460" y="3124961"/>
+            <a:ext cx="1616204" cy="621792"/>
+          </a:xfrm>
+          <a:prstGeom prst="roundRect">
+            <a:avLst/>
+          </a:prstGeom>
+          <a:solidFill>
+            <a:schemeClr val="bg1"/>
+          </a:solidFill>
+          <a:ln>
+            <a:solidFill>
+              <a:srgbClr val="D92FF5"/>
+            </a:solidFill>
+          </a:ln>
+        </p:spPr>
+        <p:style>
+          <a:lnRef idx="2">
+            <a:schemeClr val="accent1">
+              <a:shade val="50000"/>
+            </a:schemeClr>
+          </a:lnRef>
+          <a:fillRef idx="1">
+            <a:schemeClr val="accent1"/>
+          </a:fillRef>
+          <a:effectRef idx="0">
+            <a:schemeClr val="accent1"/>
+          </a:effectRef>
+          <a:fontRef idx="minor">
+            <a:schemeClr val="lt1"/>
+          </a:fontRef>
+        </p:style>
+        <p:txBody>
+          <a:bodyPr rtlCol="0" anchor="ctr"/>
+          <a:lstStyle/>
+          <a:p>
+            <a:pPr algn="ctr"/>
+            <a:r>
+              <a:rPr lang="en-US" altLang="ko-KR" sz="1200" dirty="0">
+                <a:solidFill>
+                  <a:schemeClr val="tx1"/>
+                </a:solidFill>
+                <a:latin typeface="나눔고딕" panose="020D0604000000000000" pitchFamily="50" charset="-127"/>
+                <a:ea typeface="나눔고딕" panose="020D0604000000000000" pitchFamily="50" charset="-127"/>
+              </a:rPr>
+              <a:t>Q/A, </a:t>
+            </a:r>
+            <a:r>
+              <a:rPr lang="ko-KR" altLang="en-US" sz="1200" dirty="0">
+                <a:solidFill>
+                  <a:schemeClr val="tx1"/>
+                </a:solidFill>
+                <a:latin typeface="나눔고딕" panose="020D0604000000000000" pitchFamily="50" charset="-127"/>
+                <a:ea typeface="나눔고딕" panose="020D0604000000000000" pitchFamily="50" charset="-127"/>
+              </a:rPr>
+              <a:t>요약 데이터</a:t>
+            </a:r>
+            <a:endParaRPr lang="en-US" altLang="ko-KR" sz="1200" dirty="0">
+              <a:solidFill>
+                <a:schemeClr val="tx1"/>
+              </a:solidFill>
+              <a:latin typeface="나눔고딕" panose="020D0604000000000000" pitchFamily="50" charset="-127"/>
+              <a:ea typeface="나눔고딕" panose="020D0604000000000000" pitchFamily="50" charset="-127"/>
+            </a:endParaRPr>
+          </a:p>
+          <a:p>
+            <a:pPr algn="ctr"/>
+            <a:r>
+              <a:rPr lang="ko-KR" altLang="en-US" sz="1200" dirty="0">
+                <a:solidFill>
+                  <a:schemeClr val="tx1"/>
+                </a:solidFill>
+                <a:latin typeface="나눔고딕" panose="020D0604000000000000" pitchFamily="50" charset="-127"/>
+                <a:ea typeface="나눔고딕" panose="020D0604000000000000" pitchFamily="50" charset="-127"/>
+              </a:rPr>
+              <a:t> 생성</a:t>
+            </a:r>
+          </a:p>
+        </p:txBody>
+      </p:sp>
+      <p:sp>
+        <p:nvSpPr>
+          <p:cNvPr id="54" name="순서도: 문서 53">
+            <a:extLst>
+              <a:ext uri="{FF2B5EF4-FFF2-40B4-BE49-F238E27FC236}">
+                <a16:creationId xmlns:a16="http://schemas.microsoft.com/office/drawing/2014/main" id="{14B66B4A-1D24-4BC1-85C9-C70AFFF6EFAF}"/>
+              </a:ext>
+            </a:extLst>
+          </p:cNvPr>
+          <p:cNvSpPr/>
+          <p:nvPr/>
+        </p:nvSpPr>
+        <p:spPr>
+          <a:xfrm>
+            <a:off x="12988292" y="3072892"/>
+            <a:ext cx="1616204" cy="521208"/>
+          </a:xfrm>
+          <a:prstGeom prst="flowChartDocument">
+            <a:avLst/>
+          </a:prstGeom>
+          <a:solidFill>
+            <a:schemeClr val="bg1"/>
+          </a:solidFill>
+          <a:ln>
+            <a:solidFill>
+              <a:srgbClr val="D92FF5"/>
+            </a:solidFill>
+          </a:ln>
+        </p:spPr>
+        <p:style>
+          <a:lnRef idx="2">
+            <a:schemeClr val="accent1">
+              <a:shade val="50000"/>
+            </a:schemeClr>
+          </a:lnRef>
+          <a:fillRef idx="1">
+            <a:schemeClr val="accent1"/>
+          </a:fillRef>
+          <a:effectRef idx="0">
+            <a:schemeClr val="accent1"/>
+          </a:effectRef>
+          <a:fontRef idx="minor">
+            <a:schemeClr val="lt1"/>
+          </a:fontRef>
+        </p:style>
+        <p:txBody>
+          <a:bodyPr rtlCol="0" anchor="ctr"/>
+          <a:lstStyle/>
+          <a:p>
+            <a:pPr algn="ctr"/>
+            <a:r>
+              <a:rPr lang="en-US" altLang="ko-KR" sz="1200" dirty="0">
+                <a:solidFill>
+                  <a:schemeClr val="tx1"/>
+                </a:solidFill>
+                <a:latin typeface="Arial Rounded MT Bold" panose="020F0704030504030204" pitchFamily="34" charset="0"/>
+              </a:rPr>
+              <a:t>Resolution</a:t>
+            </a:r>
+          </a:p>
+          <a:p>
+            <a:pPr algn="ctr"/>
+            <a:r>
+              <a:rPr lang="en-US" altLang="ko-KR" sz="1200" dirty="0">
+                <a:solidFill>
+                  <a:schemeClr val="tx1"/>
+                </a:solidFill>
+                <a:latin typeface="Arial Rounded MT Bold" panose="020F0704030504030204" pitchFamily="34" charset="0"/>
+              </a:rPr>
+              <a:t>Document</a:t>
+            </a:r>
+            <a:endParaRPr lang="ko-KR" altLang="en-US" sz="1200" dirty="0">
+              <a:solidFill>
+                <a:schemeClr val="tx1"/>
+              </a:solidFill>
+              <a:latin typeface="Arial Rounded MT Bold" panose="020F0704030504030204" pitchFamily="34" charset="0"/>
+            </a:endParaRPr>
+          </a:p>
+        </p:txBody>
+      </p:sp>
+      <p:sp>
+        <p:nvSpPr>
+          <p:cNvPr id="55" name="순서도: 문서 54">
+            <a:extLst>
+              <a:ext uri="{FF2B5EF4-FFF2-40B4-BE49-F238E27FC236}">
+                <a16:creationId xmlns:a16="http://schemas.microsoft.com/office/drawing/2014/main" id="{6D2B7425-AB2A-4606-A0B0-854B57DBE4C0}"/>
+              </a:ext>
+            </a:extLst>
+          </p:cNvPr>
+          <p:cNvSpPr/>
+          <p:nvPr/>
+        </p:nvSpPr>
+        <p:spPr>
+          <a:xfrm>
+            <a:off x="12915902" y="3127756"/>
+            <a:ext cx="1616204" cy="521208"/>
+          </a:xfrm>
+          <a:prstGeom prst="flowChartDocument">
+            <a:avLst/>
+          </a:prstGeom>
+          <a:solidFill>
+            <a:schemeClr val="bg1"/>
+          </a:solidFill>
+          <a:ln>
+            <a:solidFill>
+              <a:srgbClr val="D92FF5"/>
+            </a:solidFill>
+          </a:ln>
+        </p:spPr>
+        <p:style>
+          <a:lnRef idx="2">
+            <a:schemeClr val="accent1">
+              <a:shade val="50000"/>
+            </a:schemeClr>
+          </a:lnRef>
+          <a:fillRef idx="1">
+            <a:schemeClr val="accent1"/>
+          </a:fillRef>
+          <a:effectRef idx="0">
+            <a:schemeClr val="accent1"/>
+          </a:effectRef>
+          <a:fontRef idx="minor">
+            <a:schemeClr val="lt1"/>
+          </a:fontRef>
+        </p:style>
+        <p:txBody>
+          <a:bodyPr rtlCol="0" anchor="ctr"/>
+          <a:lstStyle/>
+          <a:p>
+            <a:pPr algn="ctr"/>
+            <a:r>
+              <a:rPr lang="en-US" altLang="ko-KR" sz="1200" dirty="0">
+                <a:solidFill>
+                  <a:schemeClr val="tx1"/>
+                </a:solidFill>
+                <a:latin typeface="Arial Rounded MT Bold" panose="020F0704030504030204" pitchFamily="34" charset="0"/>
+              </a:rPr>
+              <a:t>Resolution</a:t>
+            </a:r>
+          </a:p>
+          <a:p>
+            <a:pPr algn="ctr"/>
+            <a:r>
+              <a:rPr lang="en-US" altLang="ko-KR" sz="1200" dirty="0">
+                <a:solidFill>
+                  <a:schemeClr val="tx1"/>
+                </a:solidFill>
+                <a:latin typeface="Arial Rounded MT Bold" panose="020F0704030504030204" pitchFamily="34" charset="0"/>
+              </a:rPr>
+              <a:t>Document</a:t>
+            </a:r>
+            <a:endParaRPr lang="ko-KR" altLang="en-US" sz="1200" dirty="0">
+              <a:solidFill>
+                <a:schemeClr val="tx1"/>
+              </a:solidFill>
+              <a:latin typeface="Arial Rounded MT Bold" panose="020F0704030504030204" pitchFamily="34" charset="0"/>
+            </a:endParaRPr>
+          </a:p>
+        </p:txBody>
+      </p:sp>
+      <p:sp>
+        <p:nvSpPr>
+          <p:cNvPr id="56" name="순서도: 문서 55">
+            <a:extLst>
+              <a:ext uri="{FF2B5EF4-FFF2-40B4-BE49-F238E27FC236}">
+                <a16:creationId xmlns:a16="http://schemas.microsoft.com/office/drawing/2014/main" id="{F3680D89-6BF5-4D03-9616-AEF295681A19}"/>
+              </a:ext>
+            </a:extLst>
+          </p:cNvPr>
+          <p:cNvSpPr/>
+          <p:nvPr/>
+        </p:nvSpPr>
+        <p:spPr>
+          <a:xfrm>
+            <a:off x="12843512" y="3189478"/>
+            <a:ext cx="1616204" cy="521208"/>
+          </a:xfrm>
+          <a:prstGeom prst="flowChartDocument">
+            <a:avLst/>
+          </a:prstGeom>
+          <a:solidFill>
+            <a:schemeClr val="bg1"/>
+          </a:solidFill>
+          <a:ln>
+            <a:solidFill>
+              <a:srgbClr val="D92FF5"/>
+            </a:solidFill>
+          </a:ln>
+        </p:spPr>
+        <p:style>
+          <a:lnRef idx="2">
+            <a:schemeClr val="accent1">
+              <a:shade val="50000"/>
+            </a:schemeClr>
+          </a:lnRef>
+          <a:fillRef idx="1">
+            <a:schemeClr val="accent1"/>
+          </a:fillRef>
+          <a:effectRef idx="0">
+            <a:schemeClr val="accent1"/>
+          </a:effectRef>
+          <a:fontRef idx="minor">
+            <a:schemeClr val="lt1"/>
+          </a:fontRef>
+        </p:style>
+        <p:txBody>
+          <a:bodyPr rtlCol="0" anchor="ctr"/>
+          <a:lstStyle/>
+          <a:p>
+            <a:pPr algn="ctr"/>
+            <a:r>
+              <a:rPr lang="ko-KR" altLang="en-US" sz="1200" dirty="0">
+                <a:solidFill>
+                  <a:schemeClr val="tx1"/>
+                </a:solidFill>
+                <a:latin typeface="나눔고딕" panose="020D0604000000000000" pitchFamily="50" charset="-127"/>
+                <a:ea typeface="나눔고딕" panose="020D0604000000000000" pitchFamily="50" charset="-127"/>
+              </a:rPr>
+              <a:t>기업 컴플라이언스 </a:t>
+            </a:r>
+            <a:endParaRPr lang="en-US" altLang="ko-KR" sz="1200" dirty="0">
+              <a:solidFill>
+                <a:schemeClr val="tx1"/>
+              </a:solidFill>
+              <a:latin typeface="나눔고딕" panose="020D0604000000000000" pitchFamily="50" charset="-127"/>
+              <a:ea typeface="나눔고딕" panose="020D0604000000000000" pitchFamily="50" charset="-127"/>
+            </a:endParaRPr>
+          </a:p>
+          <a:p>
+            <a:pPr algn="ctr"/>
+            <a:r>
+              <a:rPr lang="ko-KR" altLang="en-US" sz="1200" dirty="0">
+                <a:solidFill>
+                  <a:schemeClr val="tx1"/>
+                </a:solidFill>
+                <a:latin typeface="나눔고딕" panose="020D0604000000000000" pitchFamily="50" charset="-127"/>
+                <a:ea typeface="나눔고딕" panose="020D0604000000000000" pitchFamily="50" charset="-127"/>
+              </a:rPr>
+              <a:t>데이터</a:t>
+            </a:r>
+          </a:p>
+        </p:txBody>
+      </p:sp>
+      <p:sp>
+        <p:nvSpPr>
+          <p:cNvPr id="57" name="화살표: 오른쪽 56">
+            <a:extLst>
+              <a:ext uri="{FF2B5EF4-FFF2-40B4-BE49-F238E27FC236}">
+                <a16:creationId xmlns:a16="http://schemas.microsoft.com/office/drawing/2014/main" id="{F19BFAAC-0EF6-4EBC-A72E-E290809A0FE9}"/>
+              </a:ext>
+            </a:extLst>
+          </p:cNvPr>
+          <p:cNvSpPr/>
+          <p:nvPr/>
+        </p:nvSpPr>
+        <p:spPr>
+          <a:xfrm>
+            <a:off x="11757662" y="2711703"/>
+            <a:ext cx="876300" cy="1448308"/>
+          </a:xfrm>
+          <a:prstGeom prst="rightArrow">
+            <a:avLst/>
+          </a:prstGeom>
+        </p:spPr>
+        <p:style>
+          <a:lnRef idx="2">
+            <a:schemeClr val="accent1">
+              <a:shade val="50000"/>
+            </a:schemeClr>
+          </a:lnRef>
+          <a:fillRef idx="1">
+            <a:schemeClr val="accent1"/>
+          </a:fillRef>
+          <a:effectRef idx="0">
+            <a:schemeClr val="accent1"/>
+          </a:effectRef>
+          <a:fontRef idx="minor">
+            <a:schemeClr val="lt1"/>
+          </a:fontRef>
+        </p:style>
+        <p:txBody>
+          <a:bodyPr rtlCol="0" anchor="ctr"/>
+          <a:lstStyle/>
+          <a:p>
+            <a:pPr algn="ctr"/>
+            <a:endParaRPr lang="ko-KR" altLang="en-US"/>
+          </a:p>
+        </p:txBody>
+      </p:sp>
+      <p:sp>
+        <p:nvSpPr>
+          <p:cNvPr id="11" name="TextBox 10">
+            <a:extLst>
+              <a:ext uri="{FF2B5EF4-FFF2-40B4-BE49-F238E27FC236}">
+                <a16:creationId xmlns:a16="http://schemas.microsoft.com/office/drawing/2014/main" id="{94BF02CD-6298-4268-BAF0-9987F034B897}"/>
+              </a:ext>
+            </a:extLst>
+          </p:cNvPr>
+          <p:cNvSpPr txBox="1"/>
+          <p:nvPr/>
+        </p:nvSpPr>
+        <p:spPr>
+          <a:xfrm>
+            <a:off x="376428" y="368300"/>
+            <a:ext cx="3624072" cy="369332"/>
+          </a:xfrm>
+          <a:prstGeom prst="rect">
+            <a:avLst/>
+          </a:prstGeom>
+          <a:noFill/>
+        </p:spPr>
+        <p:txBody>
+          <a:bodyPr wrap="square" rtlCol="0">
+            <a:spAutoFit/>
+          </a:bodyPr>
+          <a:lstStyle/>
+          <a:p>
+            <a:r>
+              <a:rPr lang="ko-KR" altLang="en-US" b="1" dirty="0">
+                <a:highlight>
+                  <a:srgbClr val="00FF00"/>
+                </a:highlight>
+                <a:latin typeface="나눔고딕" panose="020D0604000000000000" pitchFamily="50" charset="-127"/>
+                <a:ea typeface="나눔고딕" panose="020D0604000000000000" pitchFamily="50" charset="-127"/>
+              </a:rPr>
+              <a:t>데이터셋 구축 도식화</a:t>
             </a:r>
           </a:p>
         </p:txBody>
@@ -4502,10 +5712,10 @@
       </p:sp>
       <p:sp>
         <p:nvSpPr>
-          <p:cNvPr id="14" name="사각형: 둥근 모서리 13">
-            <a:extLst>
-              <a:ext uri="{FF2B5EF4-FFF2-40B4-BE49-F238E27FC236}">
-                <a16:creationId xmlns:a16="http://schemas.microsoft.com/office/drawing/2014/main" id="{375126AE-A9DB-428B-BF77-B57BDAD0FF8B}"/>
+          <p:cNvPr id="16" name="사각형: 둥근 모서리 15">
+            <a:extLst>
+              <a:ext uri="{FF2B5EF4-FFF2-40B4-BE49-F238E27FC236}">
+                <a16:creationId xmlns:a16="http://schemas.microsoft.com/office/drawing/2014/main" id="{90E985C6-A79E-4825-AC30-040641D58D0E}"/>
               </a:ext>
             </a:extLst>
           </p:cNvPr>
@@ -4514,7 +5724,7 @@
         </p:nvSpPr>
         <p:spPr>
           <a:xfrm>
-            <a:off x="2353056" y="467868"/>
+            <a:off x="7852410" y="5454904"/>
             <a:ext cx="1197864" cy="621792"/>
           </a:xfrm>
           <a:prstGeom prst="roundRect">
@@ -4557,17 +5767,47 @@
                 </a:solidFill>
                 <a:latin typeface="Arial Rounded MT Bold" panose="020F0704030504030204" pitchFamily="34" charset="0"/>
               </a:rPr>
-              <a:t>Retrieval </a:t>
-            </a:r>
-          </a:p>
-        </p:txBody>
-      </p:sp>
-      <p:sp>
-        <p:nvSpPr>
-          <p:cNvPr id="16" name="사각형: 둥근 모서리 15">
-            <a:extLst>
-              <a:ext uri="{FF2B5EF4-FFF2-40B4-BE49-F238E27FC236}">
-                <a16:creationId xmlns:a16="http://schemas.microsoft.com/office/drawing/2014/main" id="{90E985C6-A79E-4825-AC30-040641D58D0E}"/>
+              <a:t>Ontology </a:t>
+            </a:r>
+          </a:p>
+        </p:txBody>
+      </p:sp>
+      <p:pic>
+        <p:nvPicPr>
+          <p:cNvPr id="25" name="그림 24">
+            <a:extLst>
+              <a:ext uri="{FF2B5EF4-FFF2-40B4-BE49-F238E27FC236}">
+                <a16:creationId xmlns:a16="http://schemas.microsoft.com/office/drawing/2014/main" id="{A4BE52C5-9F47-4455-96C8-6A4B6CB52E93}"/>
+              </a:ext>
+            </a:extLst>
+          </p:cNvPr>
+          <p:cNvPicPr>
+            <a:picLocks noChangeAspect="1"/>
+          </p:cNvPicPr>
+          <p:nvPr/>
+        </p:nvPicPr>
+        <p:blipFill>
+          <a:blip r:embed="rId4"/>
+          <a:stretch>
+            <a:fillRect/>
+          </a:stretch>
+        </p:blipFill>
+        <p:spPr>
+          <a:xfrm>
+            <a:off x="7300722" y="5477764"/>
+            <a:ext cx="598932" cy="598932"/>
+          </a:xfrm>
+          <a:prstGeom prst="rect">
+            <a:avLst/>
+          </a:prstGeom>
+        </p:spPr>
+      </p:pic>
+      <p:sp>
+        <p:nvSpPr>
+          <p:cNvPr id="26" name="순서도: 자기 디스크 25">
+            <a:extLst>
+              <a:ext uri="{FF2B5EF4-FFF2-40B4-BE49-F238E27FC236}">
+                <a16:creationId xmlns:a16="http://schemas.microsoft.com/office/drawing/2014/main" id="{E6B8FA6A-5EE4-49AC-9758-1470308B94B9}"/>
               </a:ext>
             </a:extLst>
           </p:cNvPr>
@@ -4576,10 +5816,10 @@
         </p:nvSpPr>
         <p:spPr>
           <a:xfrm>
-            <a:off x="7852410" y="5454904"/>
+            <a:off x="4757928" y="2315718"/>
             <a:ext cx="1197864" cy="621792"/>
           </a:xfrm>
-          <a:prstGeom prst="roundRect">
+          <a:prstGeom prst="flowChartMagneticDisk">
             <a:avLst/>
           </a:prstGeom>
           <a:solidFill>
@@ -4619,59 +5859,18 @@
                 </a:solidFill>
                 <a:latin typeface="Arial Rounded MT Bold" panose="020F0704030504030204" pitchFamily="34" charset="0"/>
               </a:rPr>
-              <a:t>MCP?? Ontology?? </a:t>
-            </a:r>
-          </a:p>
-          <a:p>
-            <a:pPr algn="ctr"/>
-            <a:r>
-              <a:rPr lang="en-US" altLang="ko-KR" sz="1200" dirty="0">
-                <a:solidFill>
-                  <a:schemeClr val="tx1"/>
-                </a:solidFill>
-                <a:latin typeface="Arial Rounded MT Bold" panose="020F0704030504030204" pitchFamily="34" charset="0"/>
-              </a:rPr>
-              <a:t>Where?</a:t>
-            </a:r>
-          </a:p>
-        </p:txBody>
-      </p:sp>
-      <p:pic>
-        <p:nvPicPr>
-          <p:cNvPr id="25" name="그림 24">
-            <a:extLst>
-              <a:ext uri="{FF2B5EF4-FFF2-40B4-BE49-F238E27FC236}">
-                <a16:creationId xmlns:a16="http://schemas.microsoft.com/office/drawing/2014/main" id="{A4BE52C5-9F47-4455-96C8-6A4B6CB52E93}"/>
-              </a:ext>
-            </a:extLst>
-          </p:cNvPr>
-          <p:cNvPicPr>
-            <a:picLocks noChangeAspect="1"/>
-          </p:cNvPicPr>
-          <p:nvPr/>
-        </p:nvPicPr>
-        <p:blipFill>
-          <a:blip r:embed="rId4"/>
-          <a:stretch>
-            <a:fillRect/>
-          </a:stretch>
-        </p:blipFill>
-        <p:spPr>
-          <a:xfrm>
-            <a:off x="7300722" y="5477764"/>
-            <a:ext cx="598932" cy="598932"/>
-          </a:xfrm>
-          <a:prstGeom prst="rect">
-            <a:avLst/>
-          </a:prstGeom>
-        </p:spPr>
-      </p:pic>
-      <p:sp>
-        <p:nvSpPr>
-          <p:cNvPr id="26" name="순서도: 자기 디스크 25">
-            <a:extLst>
-              <a:ext uri="{FF2B5EF4-FFF2-40B4-BE49-F238E27FC236}">
-                <a16:creationId xmlns:a16="http://schemas.microsoft.com/office/drawing/2014/main" id="{E6B8FA6A-5EE4-49AC-9758-1470308B94B9}"/>
+              <a:t>Resolution Vector DB</a:t>
+            </a:r>
+            <a:endParaRPr lang="ko-KR" altLang="en-US" sz="1200" dirty="0"/>
+          </a:p>
+        </p:txBody>
+      </p:sp>
+      <p:sp>
+        <p:nvSpPr>
+          <p:cNvPr id="27" name="순서도: 자기 디스크 26">
+            <a:extLst>
+              <a:ext uri="{FF2B5EF4-FFF2-40B4-BE49-F238E27FC236}">
+                <a16:creationId xmlns:a16="http://schemas.microsoft.com/office/drawing/2014/main" id="{3BF2F7DA-815F-4A9D-BA27-B4A59354A808}"/>
               </a:ext>
             </a:extLst>
           </p:cNvPr>
@@ -4680,7 +5879,7 @@
         </p:nvSpPr>
         <p:spPr>
           <a:xfrm>
-            <a:off x="4757928" y="2315718"/>
+            <a:off x="4757928" y="3429000"/>
             <a:ext cx="1197864" cy="621792"/>
           </a:xfrm>
           <a:prstGeom prst="flowChartMagneticDisk">
@@ -4723,70 +5922,7 @@
                 </a:solidFill>
                 <a:latin typeface="Arial Rounded MT Bold" panose="020F0704030504030204" pitchFamily="34" charset="0"/>
               </a:rPr>
-              <a:t>Resolution Vector DB</a:t>
-            </a:r>
-            <a:endParaRPr lang="ko-KR" altLang="en-US" sz="1200" dirty="0"/>
-          </a:p>
-        </p:txBody>
-      </p:sp>
-      <p:sp>
-        <p:nvSpPr>
-          <p:cNvPr id="27" name="순서도: 자기 디스크 26">
-            <a:extLst>
-              <a:ext uri="{FF2B5EF4-FFF2-40B4-BE49-F238E27FC236}">
-                <a16:creationId xmlns:a16="http://schemas.microsoft.com/office/drawing/2014/main" id="{3BF2F7DA-815F-4A9D-BA27-B4A59354A808}"/>
-              </a:ext>
-            </a:extLst>
-          </p:cNvPr>
-          <p:cNvSpPr/>
-          <p:nvPr/>
-        </p:nvSpPr>
-        <p:spPr>
-          <a:xfrm>
-            <a:off x="4757928" y="3429000"/>
-            <a:ext cx="1197864" cy="621792"/>
-          </a:xfrm>
-          <a:prstGeom prst="flowChartMagneticDisk">
-            <a:avLst/>
-          </a:prstGeom>
-          <a:solidFill>
-            <a:schemeClr val="bg1"/>
-          </a:solidFill>
-          <a:ln>
-            <a:solidFill>
-              <a:srgbClr val="D92FF5"/>
-            </a:solidFill>
-          </a:ln>
-        </p:spPr>
-        <p:style>
-          <a:lnRef idx="2">
-            <a:schemeClr val="accent1">
-              <a:shade val="50000"/>
-            </a:schemeClr>
-          </a:lnRef>
-          <a:fillRef idx="1">
-            <a:schemeClr val="accent1"/>
-          </a:fillRef>
-          <a:effectRef idx="0">
-            <a:schemeClr val="accent1"/>
-          </a:effectRef>
-          <a:fontRef idx="minor">
-            <a:schemeClr val="lt1"/>
-          </a:fontRef>
-        </p:style>
-        <p:txBody>
-          <a:bodyPr rtlCol="0" anchor="ctr"/>
-          <a:lstStyle/>
-          <a:p>
-            <a:pPr algn="ctr"/>
-            <a:r>
-              <a:rPr lang="en-US" altLang="ko-KR" sz="1200" dirty="0">
-                <a:solidFill>
-                  <a:schemeClr val="tx1"/>
-                </a:solidFill>
-                <a:latin typeface="Arial Rounded MT Bold" panose="020F0704030504030204" pitchFamily="34" charset="0"/>
-              </a:rPr>
-              <a:t>Persona Vector DB</a:t>
+              <a:t>Personal Data Vector DB</a:t>
             </a:r>
             <a:endParaRPr lang="ko-KR" altLang="en-US" sz="1200" dirty="0"/>
           </a:p>
@@ -6641,6 +7777,671 @@
           </a:fontRef>
         </p:style>
       </p:cxnSp>
+      <p:sp>
+        <p:nvSpPr>
+          <p:cNvPr id="95" name="TextBox 94">
+            <a:extLst>
+              <a:ext uri="{FF2B5EF4-FFF2-40B4-BE49-F238E27FC236}">
+                <a16:creationId xmlns:a16="http://schemas.microsoft.com/office/drawing/2014/main" id="{FFD2094F-7B42-40DD-B922-5F1A537A563B}"/>
+              </a:ext>
+            </a:extLst>
+          </p:cNvPr>
+          <p:cNvSpPr txBox="1"/>
+          <p:nvPr/>
+        </p:nvSpPr>
+        <p:spPr>
+          <a:xfrm>
+            <a:off x="376428" y="368300"/>
+            <a:ext cx="3624072" cy="369332"/>
+          </a:xfrm>
+          <a:prstGeom prst="rect">
+            <a:avLst/>
+          </a:prstGeom>
+          <a:noFill/>
+        </p:spPr>
+        <p:txBody>
+          <a:bodyPr wrap="square" rtlCol="0">
+            <a:spAutoFit/>
+          </a:bodyPr>
+          <a:lstStyle/>
+          <a:p>
+            <a:r>
+              <a:rPr lang="ko-KR" altLang="en-US" b="1">
+                <a:highlight>
+                  <a:srgbClr val="00FF00"/>
+                </a:highlight>
+                <a:latin typeface="나눔고딕" panose="020D0604000000000000" pitchFamily="50" charset="-127"/>
+                <a:ea typeface="나눔고딕" panose="020D0604000000000000" pitchFamily="50" charset="-127"/>
+              </a:rPr>
+              <a:t>전체 방법론 도식화</a:t>
+            </a:r>
+            <a:endParaRPr lang="ko-KR" altLang="en-US" b="1" dirty="0">
+              <a:highlight>
+                <a:srgbClr val="00FF00"/>
+              </a:highlight>
+              <a:latin typeface="나눔고딕" panose="020D0604000000000000" pitchFamily="50" charset="-127"/>
+              <a:ea typeface="나눔고딕" panose="020D0604000000000000" pitchFamily="50" charset="-127"/>
+            </a:endParaRPr>
+          </a:p>
+        </p:txBody>
+      </p:sp>
+      <p:sp>
+        <p:nvSpPr>
+          <p:cNvPr id="96" name="직사각형 95">
+            <a:extLst>
+              <a:ext uri="{FF2B5EF4-FFF2-40B4-BE49-F238E27FC236}">
+                <a16:creationId xmlns:a16="http://schemas.microsoft.com/office/drawing/2014/main" id="{844300EA-0B24-4129-A473-42D193493C12}"/>
+              </a:ext>
+            </a:extLst>
+          </p:cNvPr>
+          <p:cNvSpPr/>
+          <p:nvPr/>
+        </p:nvSpPr>
+        <p:spPr>
+          <a:xfrm>
+            <a:off x="7825739" y="947102"/>
+            <a:ext cx="80391" cy="3980815"/>
+          </a:xfrm>
+          <a:prstGeom prst="rect">
+            <a:avLst/>
+          </a:prstGeom>
+          <a:solidFill>
+            <a:srgbClr val="FF0000"/>
+          </a:solidFill>
+          <a:ln>
+            <a:noFill/>
+          </a:ln>
+        </p:spPr>
+        <p:style>
+          <a:lnRef idx="2">
+            <a:schemeClr val="accent1">
+              <a:shade val="50000"/>
+            </a:schemeClr>
+          </a:lnRef>
+          <a:fillRef idx="1">
+            <a:schemeClr val="accent1"/>
+          </a:fillRef>
+          <a:effectRef idx="0">
+            <a:schemeClr val="accent1"/>
+          </a:effectRef>
+          <a:fontRef idx="minor">
+            <a:schemeClr val="lt1"/>
+          </a:fontRef>
+        </p:style>
+        <p:txBody>
+          <a:bodyPr rtlCol="0" anchor="ctr"/>
+          <a:lstStyle/>
+          <a:p>
+            <a:pPr algn="ctr"/>
+            <a:endParaRPr lang="ko-KR" altLang="en-US"/>
+          </a:p>
+        </p:txBody>
+      </p:sp>
+      <p:cxnSp>
+        <p:nvCxnSpPr>
+          <p:cNvPr id="98" name="직선 화살표 연결선 97">
+            <a:extLst>
+              <a:ext uri="{FF2B5EF4-FFF2-40B4-BE49-F238E27FC236}">
+                <a16:creationId xmlns:a16="http://schemas.microsoft.com/office/drawing/2014/main" id="{9BD809EE-4BE6-4322-9E1C-F8EBDCB1743D}"/>
+              </a:ext>
+            </a:extLst>
+          </p:cNvPr>
+          <p:cNvCxnSpPr>
+            <a:stCxn id="96" idx="2"/>
+            <a:endCxn id="16" idx="0"/>
+          </p:cNvCxnSpPr>
+          <p:nvPr/>
+        </p:nvCxnSpPr>
+        <p:spPr>
+          <a:xfrm>
+            <a:off x="7865935" y="4927917"/>
+            <a:ext cx="585407" cy="526987"/>
+          </a:xfrm>
+          <a:prstGeom prst="straightConnector1">
+            <a:avLst/>
+          </a:prstGeom>
+          <a:ln>
+            <a:tailEnd type="triangle"/>
+          </a:ln>
+        </p:spPr>
+        <p:style>
+          <a:lnRef idx="1">
+            <a:schemeClr val="dk1"/>
+          </a:lnRef>
+          <a:fillRef idx="0">
+            <a:schemeClr val="dk1"/>
+          </a:fillRef>
+          <a:effectRef idx="0">
+            <a:schemeClr val="dk1"/>
+          </a:effectRef>
+          <a:fontRef idx="minor">
+            <a:schemeClr val="tx1"/>
+          </a:fontRef>
+        </p:style>
+      </p:cxnSp>
+      <p:sp>
+        <p:nvSpPr>
+          <p:cNvPr id="99" name="Rectangle 1">
+            <a:extLst>
+              <a:ext uri="{FF2B5EF4-FFF2-40B4-BE49-F238E27FC236}">
+                <a16:creationId xmlns:a16="http://schemas.microsoft.com/office/drawing/2014/main" id="{F668E41C-F002-4CB5-8335-2A4C5B9221C3}"/>
+              </a:ext>
+            </a:extLst>
+          </p:cNvPr>
+          <p:cNvSpPr>
+            <a:spLocks noChangeArrowheads="1"/>
+          </p:cNvSpPr>
+          <p:nvPr/>
+        </p:nvSpPr>
+        <p:spPr bwMode="auto">
+          <a:xfrm>
+            <a:off x="9114854" y="5261088"/>
+            <a:ext cx="1659429" cy="1631216"/>
+          </a:xfrm>
+          <a:prstGeom prst="rect">
+            <a:avLst/>
+          </a:prstGeom>
+          <a:noFill/>
+          <a:ln>
+            <a:noFill/>
+          </a:ln>
+          <a:effectLst/>
+          <a:extLst>
+            <a:ext uri="{909E8E84-426E-40DD-AFC4-6F175D3DCCD1}">
+              <a14:hiddenFill xmlns:a14="http://schemas.microsoft.com/office/drawing/2010/main">
+                <a:solidFill>
+                  <a:schemeClr val="accent1"/>
+                </a:solidFill>
+              </a14:hiddenFill>
+            </a:ext>
+            <a:ext uri="{91240B29-F687-4F45-9708-019B960494DF}">
+              <a14:hiddenLine xmlns:a14="http://schemas.microsoft.com/office/drawing/2010/main" w="9525">
+                <a:solidFill>
+                  <a:schemeClr val="tx1"/>
+                </a:solidFill>
+                <a:miter lim="800000"/>
+                <a:headEnd/>
+                <a:tailEnd/>
+              </a14:hiddenLine>
+            </a:ext>
+            <a:ext uri="{AF507438-7753-43E0-B8FC-AC1667EBCBE1}">
+              <a14:hiddenEffects xmlns:a14="http://schemas.microsoft.com/office/drawing/2010/main">
+                <a:effectLst>
+                  <a:outerShdw dist="35921" dir="2700000" algn="ctr" rotWithShape="0">
+                    <a:schemeClr val="bg2"/>
+                  </a:outerShdw>
+                </a:effectLst>
+              </a14:hiddenEffects>
+            </a:ext>
+          </a:extLst>
+        </p:spPr>
+        <p:txBody>
+          <a:bodyPr vert="horz" wrap="none" lIns="91440" tIns="45720" rIns="91440" bIns="45720" numCol="1" anchor="ctr" anchorCtr="0" compatLnSpc="1">
+            <a:prstTxWarp prst="textNoShape">
+              <a:avLst/>
+            </a:prstTxWarp>
+            <a:spAutoFit/>
+          </a:bodyPr>
+          <a:lstStyle/>
+          <a:p>
+            <a:pPr marL="0" marR="0" lvl="0" indent="0" algn="l" defTabSz="914400" rtl="0" eaLnBrk="0" fontAlgn="base" latinLnBrk="0" hangingPunct="0">
+              <a:lnSpc>
+                <a:spcPct val="100000"/>
+              </a:lnSpc>
+              <a:spcBef>
+                <a:spcPct val="0"/>
+              </a:spcBef>
+              <a:spcAft>
+                <a:spcPct val="0"/>
+              </a:spcAft>
+              <a:buClrTx/>
+              <a:buSzTx/>
+              <a:buFontTx/>
+              <a:buNone/>
+              <a:tabLst/>
+            </a:pPr>
+            <a:r>
+              <a:rPr kumimoji="0" lang="ko-KR" altLang="ko-KR" sz="1000" b="1" i="0" u="none" strike="noStrike" cap="none" normalizeH="0" baseline="0" dirty="0">
+                <a:ln>
+                  <a:noFill/>
+                </a:ln>
+                <a:solidFill>
+                  <a:schemeClr val="tx1"/>
+                </a:solidFill>
+                <a:effectLst/>
+                <a:latin typeface="나눔고딕" panose="020D0604000000000000" pitchFamily="50" charset="-127"/>
+                <a:ea typeface="나눔고딕" panose="020D0604000000000000" pitchFamily="50" charset="-127"/>
+              </a:rPr>
+              <a:t>검색 결과:</a:t>
+            </a:r>
+          </a:p>
+          <a:p>
+            <a:pPr marL="0" marR="0" lvl="0" indent="0" algn="l" defTabSz="914400" rtl="0" eaLnBrk="0" fontAlgn="base" latinLnBrk="0" hangingPunct="0">
+              <a:lnSpc>
+                <a:spcPct val="100000"/>
+              </a:lnSpc>
+              <a:spcBef>
+                <a:spcPct val="0"/>
+              </a:spcBef>
+              <a:spcAft>
+                <a:spcPct val="0"/>
+              </a:spcAft>
+              <a:buClrTx/>
+              <a:buSzTx/>
+              <a:buFontTx/>
+              <a:buChar char="•"/>
+              <a:tabLst/>
+            </a:pPr>
+            <a:r>
+              <a:rPr kumimoji="0" lang="ko-KR" altLang="ko-KR" sz="1000" b="1" i="0" u="none" strike="noStrike" cap="none" normalizeH="0" baseline="0" dirty="0">
+                <a:ln>
+                  <a:noFill/>
+                </a:ln>
+                <a:solidFill>
+                  <a:schemeClr val="tx1"/>
+                </a:solidFill>
+                <a:effectLst/>
+                <a:latin typeface="나눔고딕" panose="020D0604000000000000" pitchFamily="50" charset="-127"/>
+                <a:ea typeface="나눔고딕" panose="020D0604000000000000" pitchFamily="50" charset="-127"/>
+              </a:rPr>
+              <a:t>의결서 </a:t>
+            </a:r>
+            <a:r>
+              <a:rPr kumimoji="0" lang="ko-KR" altLang="ko-KR" sz="1000" b="1" i="0" u="none" strike="noStrike" cap="none" normalizeH="0" baseline="0" dirty="0" err="1">
+                <a:ln>
+                  <a:noFill/>
+                </a:ln>
+                <a:solidFill>
+                  <a:schemeClr val="tx1"/>
+                </a:solidFill>
+                <a:effectLst/>
+                <a:latin typeface="나눔고딕" panose="020D0604000000000000" pitchFamily="50" charset="-127"/>
+                <a:ea typeface="나눔고딕" panose="020D0604000000000000" pitchFamily="50" charset="-127"/>
+              </a:rPr>
+              <a:t>A</a:t>
+            </a:r>
+            <a:r>
+              <a:rPr kumimoji="0" lang="ko-KR" altLang="ko-KR" sz="1000" b="1" i="0" u="none" strike="noStrike" cap="none" normalizeH="0" baseline="0" dirty="0">
+                <a:ln>
+                  <a:noFill/>
+                </a:ln>
+                <a:solidFill>
+                  <a:schemeClr val="tx1"/>
+                </a:solidFill>
+                <a:effectLst/>
+                <a:latin typeface="나눔고딕" panose="020D0604000000000000" pitchFamily="50" charset="-127"/>
+                <a:ea typeface="나눔고딕" panose="020D0604000000000000" pitchFamily="50" charset="-127"/>
+              </a:rPr>
+              <a:t> </a:t>
+            </a:r>
+          </a:p>
+          <a:p>
+            <a:pPr marL="0" marR="0" lvl="0" indent="0" algn="l" defTabSz="914400" rtl="0" eaLnBrk="0" fontAlgn="base" latinLnBrk="0" hangingPunct="0">
+              <a:lnSpc>
+                <a:spcPct val="100000"/>
+              </a:lnSpc>
+              <a:spcBef>
+                <a:spcPct val="0"/>
+              </a:spcBef>
+              <a:spcAft>
+                <a:spcPct val="0"/>
+              </a:spcAft>
+              <a:buClrTx/>
+              <a:buSzTx/>
+              <a:buFontTx/>
+              <a:buChar char="•"/>
+              <a:tabLst/>
+            </a:pPr>
+            <a:r>
+              <a:rPr kumimoji="0" lang="ko-KR" altLang="ko-KR" sz="1000" b="1" i="0" u="none" strike="noStrike" cap="none" normalizeH="0" baseline="0" dirty="0">
+                <a:ln>
+                  <a:noFill/>
+                </a:ln>
+                <a:solidFill>
+                  <a:schemeClr val="tx1"/>
+                </a:solidFill>
+                <a:effectLst/>
+                <a:latin typeface="나눔고딕" panose="020D0604000000000000" pitchFamily="50" charset="-127"/>
+                <a:ea typeface="나눔고딕" panose="020D0604000000000000" pitchFamily="50" charset="-127"/>
+              </a:rPr>
+              <a:t>법령 </a:t>
+            </a:r>
+            <a:r>
+              <a:rPr kumimoji="0" lang="ko-KR" altLang="ko-KR" sz="1000" b="1" i="0" u="none" strike="noStrike" cap="none" normalizeH="0" baseline="0" dirty="0" err="1">
+                <a:ln>
+                  <a:noFill/>
+                </a:ln>
+                <a:solidFill>
+                  <a:schemeClr val="tx1"/>
+                </a:solidFill>
+                <a:effectLst/>
+                <a:latin typeface="나눔고딕" panose="020D0604000000000000" pitchFamily="50" charset="-127"/>
+                <a:ea typeface="나눔고딕" panose="020D0604000000000000" pitchFamily="50" charset="-127"/>
+              </a:rPr>
+              <a:t>B</a:t>
+            </a:r>
+            <a:r>
+              <a:rPr kumimoji="0" lang="ko-KR" altLang="ko-KR" sz="1000" b="1" i="0" u="none" strike="noStrike" cap="none" normalizeH="0" baseline="0" dirty="0">
+                <a:ln>
+                  <a:noFill/>
+                </a:ln>
+                <a:solidFill>
+                  <a:schemeClr val="tx1"/>
+                </a:solidFill>
+                <a:effectLst/>
+                <a:latin typeface="나눔고딕" panose="020D0604000000000000" pitchFamily="50" charset="-127"/>
+                <a:ea typeface="나눔고딕" panose="020D0604000000000000" pitchFamily="50" charset="-127"/>
+              </a:rPr>
+              <a:t> </a:t>
+            </a:r>
+          </a:p>
+          <a:p>
+            <a:pPr marL="0" marR="0" lvl="0" indent="0" algn="l" defTabSz="914400" rtl="0" eaLnBrk="0" fontAlgn="base" latinLnBrk="0" hangingPunct="0">
+              <a:lnSpc>
+                <a:spcPct val="100000"/>
+              </a:lnSpc>
+              <a:spcBef>
+                <a:spcPct val="0"/>
+              </a:spcBef>
+              <a:spcAft>
+                <a:spcPct val="0"/>
+              </a:spcAft>
+              <a:buClrTx/>
+              <a:buSzTx/>
+              <a:buFontTx/>
+              <a:buChar char="•"/>
+              <a:tabLst/>
+            </a:pPr>
+            <a:r>
+              <a:rPr kumimoji="0" lang="ko-KR" altLang="ko-KR" sz="1000" b="1" i="0" u="none" strike="noStrike" cap="none" normalizeH="0" baseline="0" dirty="0">
+                <a:ln>
+                  <a:noFill/>
+                </a:ln>
+                <a:solidFill>
+                  <a:schemeClr val="tx1"/>
+                </a:solidFill>
+                <a:effectLst/>
+                <a:latin typeface="나눔고딕" panose="020D0604000000000000" pitchFamily="50" charset="-127"/>
+                <a:ea typeface="나눔고딕" panose="020D0604000000000000" pitchFamily="50" charset="-127"/>
+              </a:rPr>
+              <a:t>판례 C </a:t>
+            </a:r>
+            <a:endParaRPr kumimoji="0" lang="en-US" altLang="ko-KR" sz="1000" b="1" i="0" u="none" strike="noStrike" cap="none" normalizeH="0" baseline="0" dirty="0">
+              <a:ln>
+                <a:noFill/>
+              </a:ln>
+              <a:solidFill>
+                <a:schemeClr val="tx1"/>
+              </a:solidFill>
+              <a:effectLst/>
+              <a:latin typeface="나눔고딕" panose="020D0604000000000000" pitchFamily="50" charset="-127"/>
+              <a:ea typeface="나눔고딕" panose="020D0604000000000000" pitchFamily="50" charset="-127"/>
+            </a:endParaRPr>
+          </a:p>
+          <a:p>
+            <a:pPr marL="0" marR="0" lvl="0" indent="0" algn="l" defTabSz="914400" rtl="0" eaLnBrk="0" fontAlgn="base" latinLnBrk="0" hangingPunct="0">
+              <a:lnSpc>
+                <a:spcPct val="100000"/>
+              </a:lnSpc>
+              <a:spcBef>
+                <a:spcPct val="0"/>
+              </a:spcBef>
+              <a:spcAft>
+                <a:spcPct val="0"/>
+              </a:spcAft>
+              <a:buClrTx/>
+              <a:buSzTx/>
+              <a:buFontTx/>
+              <a:buNone/>
+              <a:tabLst/>
+            </a:pPr>
+            <a:r>
+              <a:rPr kumimoji="0" lang="ko-KR" altLang="ko-KR" sz="1000" b="1" i="0" u="none" strike="noStrike" cap="none" normalizeH="0" baseline="0" dirty="0" err="1">
+                <a:ln>
+                  <a:noFill/>
+                </a:ln>
+                <a:solidFill>
+                  <a:schemeClr val="tx1"/>
+                </a:solidFill>
+                <a:effectLst/>
+                <a:latin typeface="나눔고딕" panose="020D0604000000000000" pitchFamily="50" charset="-127"/>
+                <a:ea typeface="나눔고딕" panose="020D0604000000000000" pitchFamily="50" charset="-127"/>
+              </a:rPr>
+              <a:t>Ontology</a:t>
+            </a:r>
+            <a:r>
+              <a:rPr kumimoji="0" lang="ko-KR" altLang="ko-KR" sz="1000" b="1" i="0" u="none" strike="noStrike" cap="none" normalizeH="0" baseline="0" dirty="0">
+                <a:ln>
+                  <a:noFill/>
+                </a:ln>
+                <a:solidFill>
+                  <a:schemeClr val="tx1"/>
+                </a:solidFill>
+                <a:effectLst/>
+                <a:latin typeface="나눔고딕" panose="020D0604000000000000" pitchFamily="50" charset="-127"/>
+                <a:ea typeface="나눔고딕" panose="020D0604000000000000" pitchFamily="50" charset="-127"/>
+              </a:rPr>
+              <a:t> 적용 후:</a:t>
+            </a:r>
+          </a:p>
+          <a:p>
+            <a:pPr marL="0" marR="0" lvl="0" indent="0" algn="l" defTabSz="914400" rtl="0" eaLnBrk="0" fontAlgn="base" latinLnBrk="0" hangingPunct="0">
+              <a:lnSpc>
+                <a:spcPct val="100000"/>
+              </a:lnSpc>
+              <a:spcBef>
+                <a:spcPct val="0"/>
+              </a:spcBef>
+              <a:spcAft>
+                <a:spcPct val="0"/>
+              </a:spcAft>
+              <a:buClrTx/>
+              <a:buSzTx/>
+              <a:buFontTx/>
+              <a:buNone/>
+              <a:tabLst/>
+            </a:pPr>
+            <a:r>
+              <a:rPr kumimoji="0" lang="ko-KR" altLang="ko-KR" sz="1000" b="1" i="0" u="none" strike="noStrike" cap="none" normalizeH="0" baseline="0" dirty="0" err="1">
+                <a:ln>
+                  <a:noFill/>
+                </a:ln>
+                <a:solidFill>
+                  <a:schemeClr val="tx1"/>
+                </a:solidFill>
+                <a:effectLst/>
+                <a:latin typeface="나눔고딕" panose="020D0604000000000000" pitchFamily="50" charset="-127"/>
+                <a:ea typeface="나눔고딕" panose="020D0604000000000000" pitchFamily="50" charset="-127"/>
+              </a:rPr>
+              <a:t>A</a:t>
+            </a:r>
+            <a:r>
+              <a:rPr kumimoji="0" lang="ko-KR" altLang="ko-KR" sz="1000" b="1" i="0" u="none" strike="noStrike" cap="none" normalizeH="0" baseline="0" dirty="0">
+                <a:ln>
+                  <a:noFill/>
+                </a:ln>
+                <a:solidFill>
+                  <a:schemeClr val="tx1"/>
+                </a:solidFill>
+                <a:effectLst/>
+                <a:latin typeface="나눔고딕" panose="020D0604000000000000" pitchFamily="50" charset="-127"/>
+                <a:ea typeface="나눔고딕" panose="020D0604000000000000" pitchFamily="50" charset="-127"/>
+              </a:rPr>
+              <a:t> → 위반 유형: 불공정거래</a:t>
+            </a:r>
+            <a:br>
+              <a:rPr kumimoji="0" lang="ko-KR" altLang="ko-KR" sz="1000" b="1" i="0" u="none" strike="noStrike" cap="none" normalizeH="0" baseline="0" dirty="0">
+                <a:ln>
+                  <a:noFill/>
+                </a:ln>
+                <a:solidFill>
+                  <a:schemeClr val="tx1"/>
+                </a:solidFill>
+                <a:effectLst/>
+                <a:latin typeface="나눔고딕" panose="020D0604000000000000" pitchFamily="50" charset="-127"/>
+                <a:ea typeface="나눔고딕" panose="020D0604000000000000" pitchFamily="50" charset="-127"/>
+              </a:rPr>
+            </a:br>
+            <a:r>
+              <a:rPr kumimoji="0" lang="ko-KR" altLang="ko-KR" sz="1000" b="1" i="0" u="none" strike="noStrike" cap="none" normalizeH="0" baseline="0" dirty="0" err="1">
+                <a:ln>
+                  <a:noFill/>
+                </a:ln>
+                <a:solidFill>
+                  <a:schemeClr val="tx1"/>
+                </a:solidFill>
+                <a:effectLst/>
+                <a:latin typeface="나눔고딕" panose="020D0604000000000000" pitchFamily="50" charset="-127"/>
+                <a:ea typeface="나눔고딕" panose="020D0604000000000000" pitchFamily="50" charset="-127"/>
+              </a:rPr>
+              <a:t>A</a:t>
+            </a:r>
+            <a:r>
+              <a:rPr kumimoji="0" lang="ko-KR" altLang="ko-KR" sz="1000" b="1" i="0" u="none" strike="noStrike" cap="none" normalizeH="0" baseline="0" dirty="0">
+                <a:ln>
+                  <a:noFill/>
+                </a:ln>
+                <a:solidFill>
+                  <a:schemeClr val="tx1"/>
+                </a:solidFill>
+                <a:effectLst/>
+                <a:latin typeface="나눔고딕" panose="020D0604000000000000" pitchFamily="50" charset="-127"/>
+                <a:ea typeface="나눔고딕" panose="020D0604000000000000" pitchFamily="50" charset="-127"/>
+              </a:rPr>
+              <a:t> → 적용 법령: </a:t>
+            </a:r>
+            <a:r>
+              <a:rPr kumimoji="0" lang="ko-KR" altLang="ko-KR" sz="1000" b="1" i="0" u="none" strike="noStrike" cap="none" normalizeH="0" baseline="0" dirty="0" err="1">
+                <a:ln>
+                  <a:noFill/>
+                </a:ln>
+                <a:solidFill>
+                  <a:schemeClr val="tx1"/>
+                </a:solidFill>
+                <a:effectLst/>
+                <a:latin typeface="나눔고딕" panose="020D0604000000000000" pitchFamily="50" charset="-127"/>
+                <a:ea typeface="나눔고딕" panose="020D0604000000000000" pitchFamily="50" charset="-127"/>
+              </a:rPr>
+              <a:t>B</a:t>
+            </a:r>
+            <a:br>
+              <a:rPr kumimoji="0" lang="ko-KR" altLang="ko-KR" sz="1000" b="1" i="0" u="none" strike="noStrike" cap="none" normalizeH="0" baseline="0" dirty="0">
+                <a:ln>
+                  <a:noFill/>
+                </a:ln>
+                <a:solidFill>
+                  <a:schemeClr val="tx1"/>
+                </a:solidFill>
+                <a:effectLst/>
+                <a:latin typeface="나눔고딕" panose="020D0604000000000000" pitchFamily="50" charset="-127"/>
+                <a:ea typeface="나눔고딕" panose="020D0604000000000000" pitchFamily="50" charset="-127"/>
+              </a:rPr>
+            </a:br>
+            <a:r>
+              <a:rPr kumimoji="0" lang="ko-KR" altLang="ko-KR" sz="1000" b="1" i="0" u="none" strike="noStrike" cap="none" normalizeH="0" baseline="0" dirty="0">
+                <a:ln>
+                  <a:noFill/>
+                </a:ln>
+                <a:solidFill>
+                  <a:schemeClr val="tx1"/>
+                </a:solidFill>
+                <a:effectLst/>
+                <a:latin typeface="나눔고딕" panose="020D0604000000000000" pitchFamily="50" charset="-127"/>
+                <a:ea typeface="나눔고딕" panose="020D0604000000000000" pitchFamily="50" charset="-127"/>
+              </a:rPr>
+              <a:t>C → 유사 판례</a:t>
+            </a:r>
+          </a:p>
+          <a:p>
+            <a:pPr marL="0" marR="0" lvl="0" indent="0" algn="l" defTabSz="914400" rtl="0" eaLnBrk="0" fontAlgn="base" latinLnBrk="0" hangingPunct="0">
+              <a:lnSpc>
+                <a:spcPct val="100000"/>
+              </a:lnSpc>
+              <a:spcBef>
+                <a:spcPct val="0"/>
+              </a:spcBef>
+              <a:spcAft>
+                <a:spcPct val="0"/>
+              </a:spcAft>
+              <a:buClrTx/>
+              <a:buSzTx/>
+              <a:buFontTx/>
+              <a:buChar char="•"/>
+              <a:tabLst/>
+            </a:pPr>
+            <a:endParaRPr kumimoji="0" lang="ko-KR" altLang="ko-KR" sz="1000" b="1" i="0" u="none" strike="noStrike" cap="none" normalizeH="0" baseline="0" dirty="0">
+              <a:ln>
+                <a:noFill/>
+              </a:ln>
+              <a:solidFill>
+                <a:schemeClr val="tx1"/>
+              </a:solidFill>
+              <a:effectLst/>
+              <a:latin typeface="나눔고딕" panose="020D0604000000000000" pitchFamily="50" charset="-127"/>
+              <a:ea typeface="나눔고딕" panose="020D0604000000000000" pitchFamily="50" charset="-127"/>
+            </a:endParaRPr>
+          </a:p>
+          <a:p>
+            <a:pPr marL="0" marR="0" lvl="0" indent="0" algn="l" defTabSz="914400" rtl="0" eaLnBrk="0" fontAlgn="base" latinLnBrk="0" hangingPunct="0">
+              <a:lnSpc>
+                <a:spcPct val="100000"/>
+              </a:lnSpc>
+              <a:spcBef>
+                <a:spcPct val="0"/>
+              </a:spcBef>
+              <a:spcAft>
+                <a:spcPct val="0"/>
+              </a:spcAft>
+              <a:buClrTx/>
+              <a:buSzTx/>
+              <a:buFontTx/>
+              <a:buNone/>
+              <a:tabLst/>
+            </a:pPr>
+            <a:endParaRPr kumimoji="0" lang="ko-KR" altLang="ko-KR" sz="1000" b="1" i="0" u="none" strike="noStrike" cap="none" normalizeH="0" baseline="0" dirty="0">
+              <a:ln>
+                <a:noFill/>
+              </a:ln>
+              <a:solidFill>
+                <a:schemeClr val="tx1"/>
+              </a:solidFill>
+              <a:effectLst/>
+              <a:latin typeface="나눔고딕" panose="020D0604000000000000" pitchFamily="50" charset="-127"/>
+              <a:ea typeface="나눔고딕" panose="020D0604000000000000" pitchFamily="50" charset="-127"/>
+            </a:endParaRPr>
+          </a:p>
+        </p:txBody>
+      </p:sp>
+      <p:pic>
+        <p:nvPicPr>
+          <p:cNvPr id="50" name="그림 49">
+            <a:extLst>
+              <a:ext uri="{FF2B5EF4-FFF2-40B4-BE49-F238E27FC236}">
+                <a16:creationId xmlns:a16="http://schemas.microsoft.com/office/drawing/2014/main" id="{14743ABF-4A3C-4385-A8E9-E78AFC392136}"/>
+              </a:ext>
+            </a:extLst>
+          </p:cNvPr>
+          <p:cNvPicPr>
+            <a:picLocks noChangeAspect="1"/>
+          </p:cNvPicPr>
+          <p:nvPr/>
+        </p:nvPicPr>
+        <p:blipFill>
+          <a:blip r:embed="rId3"/>
+          <a:stretch>
+            <a:fillRect/>
+          </a:stretch>
+        </p:blipFill>
+        <p:spPr>
+          <a:xfrm>
+            <a:off x="7852410" y="5212080"/>
+            <a:ext cx="228600" cy="228600"/>
+          </a:xfrm>
+          <a:prstGeom prst="rect">
+            <a:avLst/>
+          </a:prstGeom>
+        </p:spPr>
+      </p:pic>
     </p:spTree>
     <p:extLst>
       <p:ext uri="{BB962C8B-B14F-4D97-AF65-F5344CB8AC3E}">
